--- a/outputs/ai-project-autonomy-platform/presentations/output/ai-project-autonomy-platform-onepage.pptx
+++ b/outputs/ai-project-autonomy-platform/presentations/output/ai-project-autonomy-platform-onepage.pptx
@@ -2,13 +2,13 @@
 <file path=ppt/presentation.xml><?xml version="1.0" encoding="utf-8"?>
 <p:presentation xmlns:p="http://schemas.openxmlformats.org/presentationml/2006/main">
   <p:sldMasterIdLst>
-    <p:sldMasterId xmlns:r="http://schemas.openxmlformats.org/officeDocument/2006/relationships" id="2147483648" r:id="Rd305990c9465472a"/>
+    <p:sldMasterId xmlns:r="http://schemas.openxmlformats.org/officeDocument/2006/relationships" id="2147483648" r:id="R631548c89f414d07"/>
   </p:sldMasterIdLst>
   <p:notesMasterIdLst>
-    <p:notesMasterId xmlns:r="http://schemas.openxmlformats.org/officeDocument/2006/relationships" r:id="R28511b6eab334845"/>
+    <p:notesMasterId xmlns:r="http://schemas.openxmlformats.org/officeDocument/2006/relationships" r:id="Rd4b77b5137554839"/>
   </p:notesMasterIdLst>
   <p:sldIdLst>
-    <p:sldId xmlns:r="http://schemas.openxmlformats.org/officeDocument/2006/relationships" id="256" r:id="R478d72ebb4f34b14"/>
+    <p:sldId xmlns:r="http://schemas.openxmlformats.org/officeDocument/2006/relationships" id="256" r:id="R6630f119f7ac4645"/>
   </p:sldIdLst>
   <p:sldSz cx="12192000" cy="6858000"/>
   <p:notesSz cx="6858000" cy="9144000"/>
@@ -555,7 +555,7 @@
   </p:cSld>
   <p:clrMap bg1="lt1" tx1="dk1" bg2="lt2" tx2="dk2" accent1="accent1" accent2="accent2" accent3="accent3" accent4="accent4" accent5="accent5" accent6="accent6" hlink="hlink" folHlink="folHlink"/>
   <p:sldLayoutIdLst>
-    <p:sldLayoutId xmlns:r="http://schemas.openxmlformats.org/officeDocument/2006/relationships" id="2147483649" r:id="R9f89ebf194114dc0"/>
+    <p:sldLayoutId xmlns:r="http://schemas.openxmlformats.org/officeDocument/2006/relationships" id="2147483649" r:id="Rae1dadcf4224411e"/>
   </p:sldLayoutIdLst>
   <p:txStyles>
     <p:titleStyle>
@@ -1053,7 +1053,7 @@
           <p:cNvPr id="1" name="">
             <a:extLst xmlns:a="http://schemas.openxmlformats.org/drawingml/2006/main">
               <a:ext uri="{FF2B5EF4-FFF2-40B4-BE49-F238E27FC236}">
-                <a16:creationId xmlns:a16="http://schemas.microsoft.com/office/drawing/2014/main" id="{F87F7DD8-4F66-4512-BDE3-0E78A0B2CA21}"/>
+                <a16:creationId xmlns:a16="http://schemas.microsoft.com/office/drawing/2014/main" id="{594D9010-0B07-4C05-A4C7-D1C2937612EE}"/>
               </a:ext>
             </a:extLst>
           </p:cNvPr>
@@ -1088,7 +1088,7 @@
           <p:cNvPr id="2" name="">
             <a:extLst xmlns:a="http://schemas.openxmlformats.org/drawingml/2006/main">
               <a:ext uri="{FF2B5EF4-FFF2-40B4-BE49-F238E27FC236}">
-                <a16:creationId xmlns:a16="http://schemas.microsoft.com/office/drawing/2014/main" id="{24F185F0-CC14-420A-9A95-3B15E267387E}"/>
+                <a16:creationId xmlns:a16="http://schemas.microsoft.com/office/drawing/2014/main" id="{6F5EF357-FE9B-4FD5-82F5-076DAF8EEFC3}"/>
               </a:ext>
             </a:extLst>
           </p:cNvPr>
@@ -1121,7 +1121,7 @@
           <p:cNvPr id="3" name="">
             <a:extLst xmlns:a="http://schemas.openxmlformats.org/drawingml/2006/main">
               <a:ext uri="{FF2B5EF4-FFF2-40B4-BE49-F238E27FC236}">
-                <a16:creationId xmlns:a16="http://schemas.microsoft.com/office/drawing/2014/main" id="{DC59380A-1A3C-4DBB-BD29-B1B98B80720D}"/>
+                <a16:creationId xmlns:a16="http://schemas.microsoft.com/office/drawing/2014/main" id="{973F698D-FA5C-47BE-9D00-BAEA93DDB3DD}"/>
               </a:ext>
             </a:extLst>
           </p:cNvPr>
@@ -1185,7 +1185,7 @@
           <p:cNvPr id="4" name="">
             <a:extLst xmlns:a="http://schemas.openxmlformats.org/drawingml/2006/main">
               <a:ext uri="{FF2B5EF4-FFF2-40B4-BE49-F238E27FC236}">
-                <a16:creationId xmlns:a16="http://schemas.microsoft.com/office/drawing/2014/main" id="{1E86AC4A-2D2B-4AA4-89E8-D8E3BB6FD6FE}"/>
+                <a16:creationId xmlns:a16="http://schemas.microsoft.com/office/drawing/2014/main" id="{976326AC-44C7-478F-B599-CADAF0E72468}"/>
               </a:ext>
             </a:extLst>
           </p:cNvPr>
@@ -1249,7 +1249,7 @@
           <p:cNvPr id="5" name="">
             <a:extLst xmlns:a="http://schemas.openxmlformats.org/drawingml/2006/main">
               <a:ext uri="{FF2B5EF4-FFF2-40B4-BE49-F238E27FC236}">
-                <a16:creationId xmlns:a16="http://schemas.microsoft.com/office/drawing/2014/main" id="{5C0169EE-FF36-4174-AA9F-4F34BC3DC63C}"/>
+                <a16:creationId xmlns:a16="http://schemas.microsoft.com/office/drawing/2014/main" id="{77DDAC15-536C-4EFF-8DD7-F8996C49F328}"/>
               </a:ext>
             </a:extLst>
           </p:cNvPr>
@@ -1282,7 +1282,7 @@
           <p:cNvPr id="6" name="">
             <a:extLst xmlns:a="http://schemas.openxmlformats.org/drawingml/2006/main">
               <a:ext uri="{FF2B5EF4-FFF2-40B4-BE49-F238E27FC236}">
-                <a16:creationId xmlns:a16="http://schemas.microsoft.com/office/drawing/2014/main" id="{5873D224-0016-4891-A620-27D3877E010A}"/>
+                <a16:creationId xmlns:a16="http://schemas.microsoft.com/office/drawing/2014/main" id="{A9677F74-A3E1-404F-96AD-40AD4E942948}"/>
               </a:ext>
             </a:extLst>
           </p:cNvPr>
@@ -1346,7 +1346,7 @@
           <p:cNvPr id="7" name="">
             <a:extLst xmlns:a="http://schemas.openxmlformats.org/drawingml/2006/main">
               <a:ext uri="{FF2B5EF4-FFF2-40B4-BE49-F238E27FC236}">
-                <a16:creationId xmlns:a16="http://schemas.microsoft.com/office/drawing/2014/main" id="{86963305-A1B0-4EE7-93E2-B1ADF6FB0EB7}"/>
+                <a16:creationId xmlns:a16="http://schemas.microsoft.com/office/drawing/2014/main" id="{FE304212-6351-4EFE-BCA7-432EBA558E8A}"/>
               </a:ext>
             </a:extLst>
           </p:cNvPr>
@@ -1410,7 +1410,7 @@
           <p:cNvPr id="8" name="">
             <a:extLst xmlns:a="http://schemas.openxmlformats.org/drawingml/2006/main">
               <a:ext uri="{FF2B5EF4-FFF2-40B4-BE49-F238E27FC236}">
-                <a16:creationId xmlns:a16="http://schemas.microsoft.com/office/drawing/2014/main" id="{3DA9B681-1575-4BCF-A0F3-D4F4DD8DEAC3}"/>
+                <a16:creationId xmlns:a16="http://schemas.microsoft.com/office/drawing/2014/main" id="{DE887BDA-AC83-4EBF-8EB3-A87AB9B4457C}"/>
               </a:ext>
             </a:extLst>
           </p:cNvPr>
@@ -1443,7 +1443,7 @@
           <p:cNvPr id="9" name="">
             <a:extLst xmlns:a="http://schemas.openxmlformats.org/drawingml/2006/main">
               <a:ext uri="{FF2B5EF4-FFF2-40B4-BE49-F238E27FC236}">
-                <a16:creationId xmlns:a16="http://schemas.microsoft.com/office/drawing/2014/main" id="{6411F7D0-1877-443B-9BBA-EC0AE8364A54}"/>
+                <a16:creationId xmlns:a16="http://schemas.microsoft.com/office/drawing/2014/main" id="{8E945CD1-1BF9-49BA-959A-6A50B07B53EC}"/>
               </a:ext>
             </a:extLst>
           </p:cNvPr>
@@ -1507,7 +1507,7 @@
           <p:cNvPr id="10" name="">
             <a:extLst xmlns:a="http://schemas.openxmlformats.org/drawingml/2006/main">
               <a:ext uri="{FF2B5EF4-FFF2-40B4-BE49-F238E27FC236}">
-                <a16:creationId xmlns:a16="http://schemas.microsoft.com/office/drawing/2014/main" id="{CCF91546-2AAF-44B0-9E4D-CF72E7A1E300}"/>
+                <a16:creationId xmlns:a16="http://schemas.microsoft.com/office/drawing/2014/main" id="{D9F73BAA-5685-4F8D-BBD1-07ECF2928B43}"/>
               </a:ext>
             </a:extLst>
           </p:cNvPr>
@@ -1571,7 +1571,7 @@
           <p:cNvPr id="11" name="">
             <a:extLst xmlns:a="http://schemas.openxmlformats.org/drawingml/2006/main">
               <a:ext uri="{FF2B5EF4-FFF2-40B4-BE49-F238E27FC236}">
-                <a16:creationId xmlns:a16="http://schemas.microsoft.com/office/drawing/2014/main" id="{962503D8-BBA9-45C8-9908-7A110BCD36E8}"/>
+                <a16:creationId xmlns:a16="http://schemas.microsoft.com/office/drawing/2014/main" id="{F40F6E71-A7AB-4E8B-87EE-04F34D1FA5FC}"/>
               </a:ext>
             </a:extLst>
           </p:cNvPr>
@@ -1635,7 +1635,7 @@
           <p:cNvPr id="12" name="">
             <a:extLst xmlns:a="http://schemas.openxmlformats.org/drawingml/2006/main">
               <a:ext uri="{FF2B5EF4-FFF2-40B4-BE49-F238E27FC236}">
-                <a16:creationId xmlns:a16="http://schemas.microsoft.com/office/drawing/2014/main" id="{E674942B-354F-4A3B-9F17-E7CA3710BFBE}"/>
+                <a16:creationId xmlns:a16="http://schemas.microsoft.com/office/drawing/2014/main" id="{25D9226D-37C6-4E07-A1D7-CE543CDD6636}"/>
               </a:ext>
             </a:extLst>
           </p:cNvPr>
@@ -1699,7 +1699,7 @@
           <p:cNvPr id="13" name="">
             <a:extLst xmlns:a="http://schemas.openxmlformats.org/drawingml/2006/main">
               <a:ext uri="{FF2B5EF4-FFF2-40B4-BE49-F238E27FC236}">
-                <a16:creationId xmlns:a16="http://schemas.microsoft.com/office/drawing/2014/main" id="{0CDB007C-F977-4ACD-A055-64FC6C90900F}"/>
+                <a16:creationId xmlns:a16="http://schemas.microsoft.com/office/drawing/2014/main" id="{1746BD83-9AFB-491E-A3DA-4FB05936FC9B}"/>
               </a:ext>
             </a:extLst>
           </p:cNvPr>
@@ -1763,7 +1763,7 @@
           <p:cNvPr id="14" name="">
             <a:extLst xmlns:a="http://schemas.openxmlformats.org/drawingml/2006/main">
               <a:ext uri="{FF2B5EF4-FFF2-40B4-BE49-F238E27FC236}">
-                <a16:creationId xmlns:a16="http://schemas.microsoft.com/office/drawing/2014/main" id="{71DF515D-11B5-4B0F-BC9A-555442548EDE}"/>
+                <a16:creationId xmlns:a16="http://schemas.microsoft.com/office/drawing/2014/main" id="{53B7CD3A-5D02-4D38-B03C-8F029826A994}"/>
               </a:ext>
             </a:extLst>
           </p:cNvPr>
@@ -1827,7 +1827,7 @@
           <p:cNvPr id="15" name="">
             <a:extLst xmlns:a="http://schemas.openxmlformats.org/drawingml/2006/main">
               <a:ext uri="{FF2B5EF4-FFF2-40B4-BE49-F238E27FC236}">
-                <a16:creationId xmlns:a16="http://schemas.microsoft.com/office/drawing/2014/main" id="{A606B951-30A6-4760-AFE4-576DBC3B5BF8}"/>
+                <a16:creationId xmlns:a16="http://schemas.microsoft.com/office/drawing/2014/main" id="{C44524D7-A2F2-4775-80D2-5D980F466E6A}"/>
               </a:ext>
             </a:extLst>
           </p:cNvPr>
@@ -1891,7 +1891,7 @@
           <p:cNvPr id="16" name="">
             <a:extLst xmlns:a="http://schemas.openxmlformats.org/drawingml/2006/main">
               <a:ext uri="{FF2B5EF4-FFF2-40B4-BE49-F238E27FC236}">
-                <a16:creationId xmlns:a16="http://schemas.microsoft.com/office/drawing/2014/main" id="{2ABC3D97-2C96-4E42-9916-F2EDAD23BC14}"/>
+                <a16:creationId xmlns:a16="http://schemas.microsoft.com/office/drawing/2014/main" id="{9CA8DB3B-A85E-4D99-8C39-D1012342B602}"/>
               </a:ext>
             </a:extLst>
           </p:cNvPr>
@@ -1924,7 +1924,7 @@
           <p:cNvPr id="17" name="">
             <a:extLst xmlns:a="http://schemas.openxmlformats.org/drawingml/2006/main">
               <a:ext uri="{FF2B5EF4-FFF2-40B4-BE49-F238E27FC236}">
-                <a16:creationId xmlns:a16="http://schemas.microsoft.com/office/drawing/2014/main" id="{56F52B3D-DF97-4831-97E5-DB7C574D480E}"/>
+                <a16:creationId xmlns:a16="http://schemas.microsoft.com/office/drawing/2014/main" id="{15380C2E-C345-4E4E-AC9F-5D4A23E3DAEF}"/>
               </a:ext>
             </a:extLst>
           </p:cNvPr>
@@ -1957,7 +1957,7 @@
           <p:cNvPr id="18" name="">
             <a:extLst xmlns:a="http://schemas.openxmlformats.org/drawingml/2006/main">
               <a:ext uri="{FF2B5EF4-FFF2-40B4-BE49-F238E27FC236}">
-                <a16:creationId xmlns:a16="http://schemas.microsoft.com/office/drawing/2014/main" id="{9B60E6F2-6268-432D-9356-AFA1DAAB0A40}"/>
+                <a16:creationId xmlns:a16="http://schemas.microsoft.com/office/drawing/2014/main" id="{68BFABE8-7E5E-4214-8103-302668E684D0}"/>
               </a:ext>
             </a:extLst>
           </p:cNvPr>
@@ -2021,7 +2021,7 @@
           <p:cNvPr id="19" name="">
             <a:extLst xmlns:a="http://schemas.openxmlformats.org/drawingml/2006/main">
               <a:ext uri="{FF2B5EF4-FFF2-40B4-BE49-F238E27FC236}">
-                <a16:creationId xmlns:a16="http://schemas.microsoft.com/office/drawing/2014/main" id="{53B2FED6-8D8B-420E-8FA4-08B27B761EFE}"/>
+                <a16:creationId xmlns:a16="http://schemas.microsoft.com/office/drawing/2014/main" id="{913387DD-47BC-4F36-9339-E6DAFBB266A9}"/>
               </a:ext>
             </a:extLst>
           </p:cNvPr>
@@ -2085,7 +2085,7 @@
           <p:cNvPr id="20" name="">
             <a:extLst xmlns:a="http://schemas.openxmlformats.org/drawingml/2006/main">
               <a:ext uri="{FF2B5EF4-FFF2-40B4-BE49-F238E27FC236}">
-                <a16:creationId xmlns:a16="http://schemas.microsoft.com/office/drawing/2014/main" id="{9582FA9B-781F-495E-A6AC-079B84142D1C}"/>
+                <a16:creationId xmlns:a16="http://schemas.microsoft.com/office/drawing/2014/main" id="{F72F2ECF-03FD-4EA4-ACD6-2A23407DEE1C}"/>
               </a:ext>
             </a:extLst>
           </p:cNvPr>
@@ -2118,7 +2118,7 @@
           <p:cNvPr id="21" name="">
             <a:extLst xmlns:a="http://schemas.openxmlformats.org/drawingml/2006/main">
               <a:ext uri="{FF2B5EF4-FFF2-40B4-BE49-F238E27FC236}">
-                <a16:creationId xmlns:a16="http://schemas.microsoft.com/office/drawing/2014/main" id="{5F898A59-ED6F-4784-BB45-E039C911571E}"/>
+                <a16:creationId xmlns:a16="http://schemas.microsoft.com/office/drawing/2014/main" id="{FB285AEC-7343-4C25-B751-2ADFB6E2D3B4}"/>
               </a:ext>
             </a:extLst>
           </p:cNvPr>
@@ -2182,7 +2182,7 @@
           <p:cNvPr id="22" name="">
             <a:extLst xmlns:a="http://schemas.openxmlformats.org/drawingml/2006/main">
               <a:ext uri="{FF2B5EF4-FFF2-40B4-BE49-F238E27FC236}">
-                <a16:creationId xmlns:a16="http://schemas.microsoft.com/office/drawing/2014/main" id="{E9405AF3-051D-4613-BCA2-CFFB21FFB62B}"/>
+                <a16:creationId xmlns:a16="http://schemas.microsoft.com/office/drawing/2014/main" id="{7FE19DC9-0263-448A-8422-2E8A8EA4BC8E}"/>
               </a:ext>
             </a:extLst>
           </p:cNvPr>
@@ -2246,7 +2246,7 @@
           <p:cNvPr id="23" name="">
             <a:extLst xmlns:a="http://schemas.openxmlformats.org/drawingml/2006/main">
               <a:ext uri="{FF2B5EF4-FFF2-40B4-BE49-F238E27FC236}">
-                <a16:creationId xmlns:a16="http://schemas.microsoft.com/office/drawing/2014/main" id="{CF684E5B-B305-46F8-92A5-03CF5C72A14B}"/>
+                <a16:creationId xmlns:a16="http://schemas.microsoft.com/office/drawing/2014/main" id="{9D06A51D-3EF6-4E07-81BA-4EA0587F264A}"/>
               </a:ext>
             </a:extLst>
           </p:cNvPr>
@@ -2279,7 +2279,7 @@
           <p:cNvPr id="24" name="">
             <a:extLst xmlns:a="http://schemas.openxmlformats.org/drawingml/2006/main">
               <a:ext uri="{FF2B5EF4-FFF2-40B4-BE49-F238E27FC236}">
-                <a16:creationId xmlns:a16="http://schemas.microsoft.com/office/drawing/2014/main" id="{A6F43BC3-4656-4877-BC30-90371991E677}"/>
+                <a16:creationId xmlns:a16="http://schemas.microsoft.com/office/drawing/2014/main" id="{059AB1FD-ACC1-4CE6-8449-53E03B0021FF}"/>
               </a:ext>
             </a:extLst>
           </p:cNvPr>
@@ -2343,7 +2343,7 @@
           <p:cNvPr id="25" name="">
             <a:extLst xmlns:a="http://schemas.openxmlformats.org/drawingml/2006/main">
               <a:ext uri="{FF2B5EF4-FFF2-40B4-BE49-F238E27FC236}">
-                <a16:creationId xmlns:a16="http://schemas.microsoft.com/office/drawing/2014/main" id="{E4EDD0DD-8E10-4355-A07A-B1BF7489E951}"/>
+                <a16:creationId xmlns:a16="http://schemas.microsoft.com/office/drawing/2014/main" id="{93338F49-2C9F-495E-B1FC-4E1FD519A2EE}"/>
               </a:ext>
             </a:extLst>
           </p:cNvPr>
@@ -2407,7 +2407,7 @@
           <p:cNvPr id="26" name="">
             <a:extLst xmlns:a="http://schemas.openxmlformats.org/drawingml/2006/main">
               <a:ext uri="{FF2B5EF4-FFF2-40B4-BE49-F238E27FC236}">
-                <a16:creationId xmlns:a16="http://schemas.microsoft.com/office/drawing/2014/main" id="{AAB58354-D207-443D-8A7B-AC1FBCBCE3A5}"/>
+                <a16:creationId xmlns:a16="http://schemas.microsoft.com/office/drawing/2014/main" id="{1FD067DA-FDCC-49DF-88DA-5C43BC95F162}"/>
               </a:ext>
             </a:extLst>
           </p:cNvPr>
@@ -2440,7 +2440,7 @@
           <p:cNvPr id="27" name="">
             <a:extLst xmlns:a="http://schemas.openxmlformats.org/drawingml/2006/main">
               <a:ext uri="{FF2B5EF4-FFF2-40B4-BE49-F238E27FC236}">
-                <a16:creationId xmlns:a16="http://schemas.microsoft.com/office/drawing/2014/main" id="{2666ED51-C266-4E2B-B1C2-CBB563CA0E52}"/>
+                <a16:creationId xmlns:a16="http://schemas.microsoft.com/office/drawing/2014/main" id="{C3E10321-41EC-4905-8D1F-7E3007EFB708}"/>
               </a:ext>
             </a:extLst>
           </p:cNvPr>
@@ -2504,7 +2504,7 @@
           <p:cNvPr id="28" name="">
             <a:extLst xmlns:a="http://schemas.openxmlformats.org/drawingml/2006/main">
               <a:ext uri="{FF2B5EF4-FFF2-40B4-BE49-F238E27FC236}">
-                <a16:creationId xmlns:a16="http://schemas.microsoft.com/office/drawing/2014/main" id="{1EBFAA83-219C-41FB-9D76-2DF9736BE435}"/>
+                <a16:creationId xmlns:a16="http://schemas.microsoft.com/office/drawing/2014/main" id="{91386062-7349-438F-BCB2-8709D87BF7F7}"/>
               </a:ext>
             </a:extLst>
           </p:cNvPr>
@@ -2568,7 +2568,7 @@
           <p:cNvPr id="29" name="">
             <a:extLst xmlns:a="http://schemas.openxmlformats.org/drawingml/2006/main">
               <a:ext uri="{FF2B5EF4-FFF2-40B4-BE49-F238E27FC236}">
-                <a16:creationId xmlns:a16="http://schemas.microsoft.com/office/drawing/2014/main" id="{C309DDDE-9AF2-4754-BED6-61B7EB9D8C5C}"/>
+                <a16:creationId xmlns:a16="http://schemas.microsoft.com/office/drawing/2014/main" id="{E0A7F305-F242-4195-9A27-997456539BCC}"/>
               </a:ext>
             </a:extLst>
           </p:cNvPr>
@@ -2632,7 +2632,7 @@
           <p:cNvPr id="30" name="">
             <a:extLst xmlns:a="http://schemas.openxmlformats.org/drawingml/2006/main">
               <a:ext uri="{FF2B5EF4-FFF2-40B4-BE49-F238E27FC236}">
-                <a16:creationId xmlns:a16="http://schemas.microsoft.com/office/drawing/2014/main" id="{4F7A7893-4C48-4737-86EE-572CCD7761A3}"/>
+                <a16:creationId xmlns:a16="http://schemas.microsoft.com/office/drawing/2014/main" id="{EBE0479B-DE33-443E-8942-B193343DF620}"/>
               </a:ext>
             </a:extLst>
           </p:cNvPr>
@@ -2696,7 +2696,7 @@
           <p:cNvPr id="31" name="">
             <a:extLst xmlns:a="http://schemas.openxmlformats.org/drawingml/2006/main">
               <a:ext uri="{FF2B5EF4-FFF2-40B4-BE49-F238E27FC236}">
-                <a16:creationId xmlns:a16="http://schemas.microsoft.com/office/drawing/2014/main" id="{C28D5207-4B26-49A4-8C17-0A2023E26212}"/>
+                <a16:creationId xmlns:a16="http://schemas.microsoft.com/office/drawing/2014/main" id="{643533C3-F395-482D-96D5-BE8DAC82E4B6}"/>
               </a:ext>
             </a:extLst>
           </p:cNvPr>
@@ -2760,7 +2760,7 @@
           <p:cNvPr id="32" name="">
             <a:extLst xmlns:a="http://schemas.openxmlformats.org/drawingml/2006/main">
               <a:ext uri="{FF2B5EF4-FFF2-40B4-BE49-F238E27FC236}">
-                <a16:creationId xmlns:a16="http://schemas.microsoft.com/office/drawing/2014/main" id="{1682A8AE-053A-443C-8A24-3D1F62CC8C42}"/>
+                <a16:creationId xmlns:a16="http://schemas.microsoft.com/office/drawing/2014/main" id="{63DA4B6A-DE8C-4D33-8619-9DFD4E795FB9}"/>
               </a:ext>
             </a:extLst>
           </p:cNvPr>
@@ -2793,7 +2793,7 @@
           <p:cNvPr id="33" name="">
             <a:extLst xmlns:a="http://schemas.openxmlformats.org/drawingml/2006/main">
               <a:ext uri="{FF2B5EF4-FFF2-40B4-BE49-F238E27FC236}">
-                <a16:creationId xmlns:a16="http://schemas.microsoft.com/office/drawing/2014/main" id="{2CAE12B5-2507-4CEE-B71D-DA234EF36BE6}"/>
+                <a16:creationId xmlns:a16="http://schemas.microsoft.com/office/drawing/2014/main" id="{EEBE29AA-867A-426F-ABA6-D292C64B08ED}"/>
               </a:ext>
             </a:extLst>
           </p:cNvPr>
@@ -2826,7 +2826,7 @@
           <p:cNvPr id="34" name="">
             <a:extLst xmlns:a="http://schemas.openxmlformats.org/drawingml/2006/main">
               <a:ext uri="{FF2B5EF4-FFF2-40B4-BE49-F238E27FC236}">
-                <a16:creationId xmlns:a16="http://schemas.microsoft.com/office/drawing/2014/main" id="{EE7344E1-0058-4215-A70D-98F9B965E36D}"/>
+                <a16:creationId xmlns:a16="http://schemas.microsoft.com/office/drawing/2014/main" id="{2F20B707-D92B-4338-80A6-A5D5C2E85FAF}"/>
               </a:ext>
             </a:extLst>
           </p:cNvPr>
@@ -2859,7 +2859,7 @@
           <p:cNvPr id="35" name="">
             <a:extLst xmlns:a="http://schemas.openxmlformats.org/drawingml/2006/main">
               <a:ext uri="{FF2B5EF4-FFF2-40B4-BE49-F238E27FC236}">
-                <a16:creationId xmlns:a16="http://schemas.microsoft.com/office/drawing/2014/main" id="{1F00E7C2-F328-4CD0-9829-25BEDB13071B}"/>
+                <a16:creationId xmlns:a16="http://schemas.microsoft.com/office/drawing/2014/main" id="{6D22E08A-62B8-45FE-B6FE-D8A79BC38F97}"/>
               </a:ext>
             </a:extLst>
           </p:cNvPr>
@@ -2923,7 +2923,7 @@
           <p:cNvPr id="36" name="">
             <a:extLst xmlns:a="http://schemas.openxmlformats.org/drawingml/2006/main">
               <a:ext uri="{FF2B5EF4-FFF2-40B4-BE49-F238E27FC236}">
-                <a16:creationId xmlns:a16="http://schemas.microsoft.com/office/drawing/2014/main" id="{EBCD7394-C253-4B02-A745-0204681B2463}"/>
+                <a16:creationId xmlns:a16="http://schemas.microsoft.com/office/drawing/2014/main" id="{2A2D8C2A-358E-45A3-A264-6B8132DEC9E5}"/>
               </a:ext>
             </a:extLst>
           </p:cNvPr>
@@ -2987,7 +2987,7 @@
           <p:cNvPr id="37" name="">
             <a:extLst xmlns:a="http://schemas.openxmlformats.org/drawingml/2006/main">
               <a:ext uri="{FF2B5EF4-FFF2-40B4-BE49-F238E27FC236}">
-                <a16:creationId xmlns:a16="http://schemas.microsoft.com/office/drawing/2014/main" id="{5B510B62-2401-4BBB-88C8-32A2B19BAC4D}"/>
+                <a16:creationId xmlns:a16="http://schemas.microsoft.com/office/drawing/2014/main" id="{14614E40-40D9-4FA0-AB0D-141A970AF276}"/>
               </a:ext>
             </a:extLst>
           </p:cNvPr>
@@ -3051,7 +3051,7 @@
           <p:cNvPr id="38" name="">
             <a:extLst xmlns:a="http://schemas.openxmlformats.org/drawingml/2006/main">
               <a:ext uri="{FF2B5EF4-FFF2-40B4-BE49-F238E27FC236}">
-                <a16:creationId xmlns:a16="http://schemas.microsoft.com/office/drawing/2014/main" id="{5237E195-5E6E-40F0-9249-FF519B7E5414}"/>
+                <a16:creationId xmlns:a16="http://schemas.microsoft.com/office/drawing/2014/main" id="{BE22371A-E14E-440A-9184-F22576D80D6C}"/>
               </a:ext>
             </a:extLst>
           </p:cNvPr>
@@ -3084,7 +3084,7 @@
           <p:cNvPr id="39" name="">
             <a:extLst xmlns:a="http://schemas.openxmlformats.org/drawingml/2006/main">
               <a:ext uri="{FF2B5EF4-FFF2-40B4-BE49-F238E27FC236}">
-                <a16:creationId xmlns:a16="http://schemas.microsoft.com/office/drawing/2014/main" id="{A078CBB6-0D6F-4A7D-9A2E-84A7B8FB56C9}"/>
+                <a16:creationId xmlns:a16="http://schemas.microsoft.com/office/drawing/2014/main" id="{418AD0C5-AFAB-41D1-A10B-ED7192B5A690}"/>
               </a:ext>
             </a:extLst>
           </p:cNvPr>
@@ -3117,7 +3117,7 @@
           <p:cNvPr id="40" name="">
             <a:extLst xmlns:a="http://schemas.openxmlformats.org/drawingml/2006/main">
               <a:ext uri="{FF2B5EF4-FFF2-40B4-BE49-F238E27FC236}">
-                <a16:creationId xmlns:a16="http://schemas.microsoft.com/office/drawing/2014/main" id="{77495954-BAF3-400D-99F5-6A1310677820}"/>
+                <a16:creationId xmlns:a16="http://schemas.microsoft.com/office/drawing/2014/main" id="{A49AF14A-F5FC-468E-A9C9-30E0BA214D92}"/>
               </a:ext>
             </a:extLst>
           </p:cNvPr>
@@ -3181,7 +3181,7 @@
           <p:cNvPr id="41" name="">
             <a:extLst xmlns:a="http://schemas.openxmlformats.org/drawingml/2006/main">
               <a:ext uri="{FF2B5EF4-FFF2-40B4-BE49-F238E27FC236}">
-                <a16:creationId xmlns:a16="http://schemas.microsoft.com/office/drawing/2014/main" id="{578835E7-BAC5-4885-B805-CB844EC15074}"/>
+                <a16:creationId xmlns:a16="http://schemas.microsoft.com/office/drawing/2014/main" id="{AEBE1FEE-D88B-42F2-8EC7-65E8523DE8E9}"/>
               </a:ext>
             </a:extLst>
           </p:cNvPr>
@@ -3245,7 +3245,7 @@
           <p:cNvPr id="42" name="">
             <a:extLst xmlns:a="http://schemas.openxmlformats.org/drawingml/2006/main">
               <a:ext uri="{FF2B5EF4-FFF2-40B4-BE49-F238E27FC236}">
-                <a16:creationId xmlns:a16="http://schemas.microsoft.com/office/drawing/2014/main" id="{8A9FDDBD-9243-45D5-9B45-3E41A319C8EE}"/>
+                <a16:creationId xmlns:a16="http://schemas.microsoft.com/office/drawing/2014/main" id="{8D220BE1-9584-45A5-9763-282FE4D95DCE}"/>
               </a:ext>
             </a:extLst>
           </p:cNvPr>
@@ -3309,7 +3309,7 @@
           <p:cNvPr id="43" name="">
             <a:extLst xmlns:a="http://schemas.openxmlformats.org/drawingml/2006/main">
               <a:ext uri="{FF2B5EF4-FFF2-40B4-BE49-F238E27FC236}">
-                <a16:creationId xmlns:a16="http://schemas.microsoft.com/office/drawing/2014/main" id="{3E051D92-12A2-4ED7-A939-B3E44F269ACA}"/>
+                <a16:creationId xmlns:a16="http://schemas.microsoft.com/office/drawing/2014/main" id="{B9D68A9C-C705-4E0A-87FF-E6CC0CFDCC77}"/>
               </a:ext>
             </a:extLst>
           </p:cNvPr>
@@ -3342,7 +3342,7 @@
           <p:cNvPr id="44" name="">
             <a:extLst xmlns:a="http://schemas.openxmlformats.org/drawingml/2006/main">
               <a:ext uri="{FF2B5EF4-FFF2-40B4-BE49-F238E27FC236}">
-                <a16:creationId xmlns:a16="http://schemas.microsoft.com/office/drawing/2014/main" id="{37FE3246-5EE5-4665-9705-4EE419986CF8}"/>
+                <a16:creationId xmlns:a16="http://schemas.microsoft.com/office/drawing/2014/main" id="{365CE7E2-E577-4BA9-A3DA-35D97B3BECF6}"/>
               </a:ext>
             </a:extLst>
           </p:cNvPr>
@@ -3375,7 +3375,7 @@
           <p:cNvPr id="45" name="">
             <a:extLst xmlns:a="http://schemas.openxmlformats.org/drawingml/2006/main">
               <a:ext uri="{FF2B5EF4-FFF2-40B4-BE49-F238E27FC236}">
-                <a16:creationId xmlns:a16="http://schemas.microsoft.com/office/drawing/2014/main" id="{C561E4C5-3E7C-4C76-96BF-E07BBE3D539F}"/>
+                <a16:creationId xmlns:a16="http://schemas.microsoft.com/office/drawing/2014/main" id="{E37CC40A-3D7E-4C20-BF82-AC771C15F7C8}"/>
               </a:ext>
             </a:extLst>
           </p:cNvPr>
@@ -3439,7 +3439,7 @@
           <p:cNvPr id="46" name="">
             <a:extLst xmlns:a="http://schemas.openxmlformats.org/drawingml/2006/main">
               <a:ext uri="{FF2B5EF4-FFF2-40B4-BE49-F238E27FC236}">
-                <a16:creationId xmlns:a16="http://schemas.microsoft.com/office/drawing/2014/main" id="{B0D9A5DE-E55A-474A-81C4-4F93D7D1DF19}"/>
+                <a16:creationId xmlns:a16="http://schemas.microsoft.com/office/drawing/2014/main" id="{600BB17B-0A9A-4BCC-A509-EC3E3E852453}"/>
               </a:ext>
             </a:extLst>
           </p:cNvPr>
@@ -3503,7 +3503,7 @@
           <p:cNvPr id="47" name="">
             <a:extLst xmlns:a="http://schemas.openxmlformats.org/drawingml/2006/main">
               <a:ext uri="{FF2B5EF4-FFF2-40B4-BE49-F238E27FC236}">
-                <a16:creationId xmlns:a16="http://schemas.microsoft.com/office/drawing/2014/main" id="{789F00D4-F19C-4B26-9C01-095686676253}"/>
+                <a16:creationId xmlns:a16="http://schemas.microsoft.com/office/drawing/2014/main" id="{CED30E01-A17D-42E4-8F6C-7208A2E0FC62}"/>
               </a:ext>
             </a:extLst>
           </p:cNvPr>
@@ -3567,7 +3567,7 @@
           <p:cNvPr id="48" name="">
             <a:extLst xmlns:a="http://schemas.openxmlformats.org/drawingml/2006/main">
               <a:ext uri="{FF2B5EF4-FFF2-40B4-BE49-F238E27FC236}">
-                <a16:creationId xmlns:a16="http://schemas.microsoft.com/office/drawing/2014/main" id="{565CF254-AADD-48F8-B886-13973911FA88}"/>
+                <a16:creationId xmlns:a16="http://schemas.microsoft.com/office/drawing/2014/main" id="{1C13CC81-4C54-43CF-9536-0CA6CDE963A0}"/>
               </a:ext>
             </a:extLst>
           </p:cNvPr>
@@ -3600,7 +3600,7 @@
           <p:cNvPr id="49" name="">
             <a:extLst xmlns:a="http://schemas.openxmlformats.org/drawingml/2006/main">
               <a:ext uri="{FF2B5EF4-FFF2-40B4-BE49-F238E27FC236}">
-                <a16:creationId xmlns:a16="http://schemas.microsoft.com/office/drawing/2014/main" id="{E7F465E6-5A4A-465C-B5FD-65B1873329BD}"/>
+                <a16:creationId xmlns:a16="http://schemas.microsoft.com/office/drawing/2014/main" id="{B8C4EE29-FFDE-4E07-BB35-729318D516A5}"/>
               </a:ext>
             </a:extLst>
           </p:cNvPr>
@@ -3664,7 +3664,7 @@
           <p:cNvPr id="50" name="">
             <a:extLst xmlns:a="http://schemas.openxmlformats.org/drawingml/2006/main">
               <a:ext uri="{FF2B5EF4-FFF2-40B4-BE49-F238E27FC236}">
-                <a16:creationId xmlns:a16="http://schemas.microsoft.com/office/drawing/2014/main" id="{779EE6B7-F808-411F-A65C-8E61F2E54FC1}"/>
+                <a16:creationId xmlns:a16="http://schemas.microsoft.com/office/drawing/2014/main" id="{790B6BB1-C7ED-480D-86E2-CC9F73808D64}"/>
               </a:ext>
             </a:extLst>
           </p:cNvPr>
@@ -3697,7 +3697,7 @@
           <p:cNvPr id="51" name="">
             <a:extLst xmlns:a="http://schemas.openxmlformats.org/drawingml/2006/main">
               <a:ext uri="{FF2B5EF4-FFF2-40B4-BE49-F238E27FC236}">
-                <a16:creationId xmlns:a16="http://schemas.microsoft.com/office/drawing/2014/main" id="{2B59318A-E1DF-44A8-978C-B70EF57C1B23}"/>
+                <a16:creationId xmlns:a16="http://schemas.microsoft.com/office/drawing/2014/main" id="{14813C1B-49FF-40AA-84E5-93A65AA465FD}"/>
               </a:ext>
             </a:extLst>
           </p:cNvPr>
@@ -3730,7 +3730,7 @@
           <p:cNvPr id="52" name="">
             <a:extLst xmlns:a="http://schemas.openxmlformats.org/drawingml/2006/main">
               <a:ext uri="{FF2B5EF4-FFF2-40B4-BE49-F238E27FC236}">
-                <a16:creationId xmlns:a16="http://schemas.microsoft.com/office/drawing/2014/main" id="{3CBFCAD1-0884-432C-AE4B-7552F4E1A460}"/>
+                <a16:creationId xmlns:a16="http://schemas.microsoft.com/office/drawing/2014/main" id="{2EA2C909-BFE5-42BA-8FF5-C71F30730C93}"/>
               </a:ext>
             </a:extLst>
           </p:cNvPr>
@@ -3794,7 +3794,7 @@
           <p:cNvPr id="53" name="">
             <a:extLst xmlns:a="http://schemas.openxmlformats.org/drawingml/2006/main">
               <a:ext uri="{FF2B5EF4-FFF2-40B4-BE49-F238E27FC236}">
-                <a16:creationId xmlns:a16="http://schemas.microsoft.com/office/drawing/2014/main" id="{A320341A-6BB2-4649-B64B-B3A8655AD4FE}"/>
+                <a16:creationId xmlns:a16="http://schemas.microsoft.com/office/drawing/2014/main" id="{F33E28EF-4B6E-417F-8C72-5039EB11FB70}"/>
               </a:ext>
             </a:extLst>
           </p:cNvPr>
@@ -3858,7 +3858,7 @@
           <p:cNvPr id="54" name="">
             <a:extLst xmlns:a="http://schemas.openxmlformats.org/drawingml/2006/main">
               <a:ext uri="{FF2B5EF4-FFF2-40B4-BE49-F238E27FC236}">
-                <a16:creationId xmlns:a16="http://schemas.microsoft.com/office/drawing/2014/main" id="{A046A9E6-0186-435B-8887-A0259EF6DD8B}"/>
+                <a16:creationId xmlns:a16="http://schemas.microsoft.com/office/drawing/2014/main" id="{C0C502F2-A068-4EBD-9B91-07E1576B8946}"/>
               </a:ext>
             </a:extLst>
           </p:cNvPr>
@@ -3922,7 +3922,7 @@
           <p:cNvPr id="55" name="">
             <a:extLst xmlns:a="http://schemas.openxmlformats.org/drawingml/2006/main">
               <a:ext uri="{FF2B5EF4-FFF2-40B4-BE49-F238E27FC236}">
-                <a16:creationId xmlns:a16="http://schemas.microsoft.com/office/drawing/2014/main" id="{51E3BCF9-5B84-4043-910F-8495CACA74C6}"/>
+                <a16:creationId xmlns:a16="http://schemas.microsoft.com/office/drawing/2014/main" id="{B9426343-7A4C-4DF5-AD17-8E81771C09D8}"/>
               </a:ext>
             </a:extLst>
           </p:cNvPr>
@@ -3955,7 +3955,7 @@
           <p:cNvPr id="56" name="">
             <a:extLst xmlns:a="http://schemas.openxmlformats.org/drawingml/2006/main">
               <a:ext uri="{FF2B5EF4-FFF2-40B4-BE49-F238E27FC236}">
-                <a16:creationId xmlns:a16="http://schemas.microsoft.com/office/drawing/2014/main" id="{60E5A21F-CC68-4B5D-93CC-47AA6E29F287}"/>
+                <a16:creationId xmlns:a16="http://schemas.microsoft.com/office/drawing/2014/main" id="{F06F84FE-3F75-4AC7-A3DF-F3EDB41DA561}"/>
               </a:ext>
             </a:extLst>
           </p:cNvPr>
@@ -3988,7 +3988,7 @@
           <p:cNvPr id="57" name="">
             <a:extLst xmlns:a="http://schemas.openxmlformats.org/drawingml/2006/main">
               <a:ext uri="{FF2B5EF4-FFF2-40B4-BE49-F238E27FC236}">
-                <a16:creationId xmlns:a16="http://schemas.microsoft.com/office/drawing/2014/main" id="{FF0588BC-2282-4EDE-A36D-37552931A05E}"/>
+                <a16:creationId xmlns:a16="http://schemas.microsoft.com/office/drawing/2014/main" id="{E09CD831-5493-4E24-B559-6CED9504DE3E}"/>
               </a:ext>
             </a:extLst>
           </p:cNvPr>
@@ -4052,7 +4052,7 @@
           <p:cNvPr id="58" name="">
             <a:extLst xmlns:a="http://schemas.openxmlformats.org/drawingml/2006/main">
               <a:ext uri="{FF2B5EF4-FFF2-40B4-BE49-F238E27FC236}">
-                <a16:creationId xmlns:a16="http://schemas.microsoft.com/office/drawing/2014/main" id="{AC0AC148-8DD5-4F3A-9701-3D29CD187755}"/>
+                <a16:creationId xmlns:a16="http://schemas.microsoft.com/office/drawing/2014/main" id="{3F01FAC1-A58F-407A-AE70-D1AF1322A833}"/>
               </a:ext>
             </a:extLst>
           </p:cNvPr>
@@ -4116,7 +4116,7 @@
           <p:cNvPr id="59" name="">
             <a:extLst xmlns:a="http://schemas.openxmlformats.org/drawingml/2006/main">
               <a:ext uri="{FF2B5EF4-FFF2-40B4-BE49-F238E27FC236}">
-                <a16:creationId xmlns:a16="http://schemas.microsoft.com/office/drawing/2014/main" id="{89ED18CC-6C31-4BB8-92B0-369CECB5068A}"/>
+                <a16:creationId xmlns:a16="http://schemas.microsoft.com/office/drawing/2014/main" id="{7F1642F7-B465-4E1E-B194-B9D13E744E36}"/>
               </a:ext>
             </a:extLst>
           </p:cNvPr>
@@ -4180,7 +4180,7 @@
           <p:cNvPr id="60" name="">
             <a:extLst xmlns:a="http://schemas.openxmlformats.org/drawingml/2006/main">
               <a:ext uri="{FF2B5EF4-FFF2-40B4-BE49-F238E27FC236}">
-                <a16:creationId xmlns:a16="http://schemas.microsoft.com/office/drawing/2014/main" id="{A6224FD5-0C07-4C90-844E-8CDDC95E0E5E}"/>
+                <a16:creationId xmlns:a16="http://schemas.microsoft.com/office/drawing/2014/main" id="{A5A3298B-A29F-45FD-A74A-3E40C0C2BDE0}"/>
               </a:ext>
             </a:extLst>
           </p:cNvPr>
@@ -4213,7 +4213,7 @@
           <p:cNvPr id="61" name="">
             <a:extLst xmlns:a="http://schemas.openxmlformats.org/drawingml/2006/main">
               <a:ext uri="{FF2B5EF4-FFF2-40B4-BE49-F238E27FC236}">
-                <a16:creationId xmlns:a16="http://schemas.microsoft.com/office/drawing/2014/main" id="{9FD8F292-F76A-4168-A2B3-0CEB1F851DCE}"/>
+                <a16:creationId xmlns:a16="http://schemas.microsoft.com/office/drawing/2014/main" id="{6D99D7B0-4F89-494E-B9D0-9E6FEB62FAC0}"/>
               </a:ext>
             </a:extLst>
           </p:cNvPr>
@@ -4246,7 +4246,7 @@
           <p:cNvPr id="62" name="">
             <a:extLst xmlns:a="http://schemas.openxmlformats.org/drawingml/2006/main">
               <a:ext uri="{FF2B5EF4-FFF2-40B4-BE49-F238E27FC236}">
-                <a16:creationId xmlns:a16="http://schemas.microsoft.com/office/drawing/2014/main" id="{0E8BCE6D-63F5-4081-85FA-CC710D5A8C2F}"/>
+                <a16:creationId xmlns:a16="http://schemas.microsoft.com/office/drawing/2014/main" id="{CB0968FF-F661-488D-9EC4-396F42E9DC41}"/>
               </a:ext>
             </a:extLst>
           </p:cNvPr>
@@ -4310,7 +4310,7 @@
           <p:cNvPr id="63" name="">
             <a:extLst xmlns:a="http://schemas.openxmlformats.org/drawingml/2006/main">
               <a:ext uri="{FF2B5EF4-FFF2-40B4-BE49-F238E27FC236}">
-                <a16:creationId xmlns:a16="http://schemas.microsoft.com/office/drawing/2014/main" id="{A105AF44-3AD2-452D-877F-15C020ED6121}"/>
+                <a16:creationId xmlns:a16="http://schemas.microsoft.com/office/drawing/2014/main" id="{FA362E6A-40C4-4839-99FB-37912FE72FDC}"/>
               </a:ext>
             </a:extLst>
           </p:cNvPr>
@@ -4374,7 +4374,7 @@
           <p:cNvPr id="64" name="">
             <a:extLst xmlns:a="http://schemas.openxmlformats.org/drawingml/2006/main">
               <a:ext uri="{FF2B5EF4-FFF2-40B4-BE49-F238E27FC236}">
-                <a16:creationId xmlns:a16="http://schemas.microsoft.com/office/drawing/2014/main" id="{47D72025-46AA-486E-9A92-84860F75FFCC}"/>
+                <a16:creationId xmlns:a16="http://schemas.microsoft.com/office/drawing/2014/main" id="{5E5DDA80-D277-4394-8632-DF47A9133DC0}"/>
               </a:ext>
             </a:extLst>
           </p:cNvPr>
@@ -4438,7 +4438,7 @@
           <p:cNvPr id="65" name="">
             <a:extLst xmlns:a="http://schemas.openxmlformats.org/drawingml/2006/main">
               <a:ext uri="{FF2B5EF4-FFF2-40B4-BE49-F238E27FC236}">
-                <a16:creationId xmlns:a16="http://schemas.microsoft.com/office/drawing/2014/main" id="{531395B8-4FC7-4D03-A8E2-717C854BBA9F}"/>
+                <a16:creationId xmlns:a16="http://schemas.microsoft.com/office/drawing/2014/main" id="{77192D57-206B-4F42-ACC8-CA80F4D35321}"/>
               </a:ext>
             </a:extLst>
           </p:cNvPr>
@@ -4471,7 +4471,7 @@
           <p:cNvPr id="66" name="">
             <a:extLst xmlns:a="http://schemas.openxmlformats.org/drawingml/2006/main">
               <a:ext uri="{FF2B5EF4-FFF2-40B4-BE49-F238E27FC236}">
-                <a16:creationId xmlns:a16="http://schemas.microsoft.com/office/drawing/2014/main" id="{DF5D66C7-4059-4513-B4E2-11830458BBB5}"/>
+                <a16:creationId xmlns:a16="http://schemas.microsoft.com/office/drawing/2014/main" id="{2FCDA4BB-E7DC-419F-9C6E-AC0332C201DB}"/>
               </a:ext>
             </a:extLst>
           </p:cNvPr>
@@ -4504,7 +4504,7 @@
           <p:cNvPr id="67" name="">
             <a:extLst xmlns:a="http://schemas.openxmlformats.org/drawingml/2006/main">
               <a:ext uri="{FF2B5EF4-FFF2-40B4-BE49-F238E27FC236}">
-                <a16:creationId xmlns:a16="http://schemas.microsoft.com/office/drawing/2014/main" id="{BDC10BBD-A52A-4072-9522-520BAB136CDB}"/>
+                <a16:creationId xmlns:a16="http://schemas.microsoft.com/office/drawing/2014/main" id="{276E909F-8455-4A68-8F6B-FED840E0C4B1}"/>
               </a:ext>
             </a:extLst>
           </p:cNvPr>
@@ -4568,7 +4568,7 @@
           <p:cNvPr id="68" name="">
             <a:extLst xmlns:a="http://schemas.openxmlformats.org/drawingml/2006/main">
               <a:ext uri="{FF2B5EF4-FFF2-40B4-BE49-F238E27FC236}">
-                <a16:creationId xmlns:a16="http://schemas.microsoft.com/office/drawing/2014/main" id="{6680E3FC-A2DF-48BD-BFC4-770C205DD4A0}"/>
+                <a16:creationId xmlns:a16="http://schemas.microsoft.com/office/drawing/2014/main" id="{B2B11FE4-4023-4A0C-950F-52B8B9B996ED}"/>
               </a:ext>
             </a:extLst>
           </p:cNvPr>
@@ -4632,7 +4632,7 @@
           <p:cNvPr id="69" name="">
             <a:extLst xmlns:a="http://schemas.openxmlformats.org/drawingml/2006/main">
               <a:ext uri="{FF2B5EF4-FFF2-40B4-BE49-F238E27FC236}">
-                <a16:creationId xmlns:a16="http://schemas.microsoft.com/office/drawing/2014/main" id="{90FE6EB5-5B4C-4D2D-B1B8-033214E398DD}"/>
+                <a16:creationId xmlns:a16="http://schemas.microsoft.com/office/drawing/2014/main" id="{AFFDE229-F640-41BD-8929-B6AF4CB553DA}"/>
               </a:ext>
             </a:extLst>
           </p:cNvPr>
@@ -4696,7 +4696,7 @@
           <p:cNvPr id="70" name="">
             <a:extLst xmlns:a="http://schemas.openxmlformats.org/drawingml/2006/main">
               <a:ext uri="{FF2B5EF4-FFF2-40B4-BE49-F238E27FC236}">
-                <a16:creationId xmlns:a16="http://schemas.microsoft.com/office/drawing/2014/main" id="{468CDB58-460A-44C9-B32A-FEF89D9DACD8}"/>
+                <a16:creationId xmlns:a16="http://schemas.microsoft.com/office/drawing/2014/main" id="{B5D982CC-ADDC-41F4-886E-8AC6959A30EA}"/>
               </a:ext>
             </a:extLst>
           </p:cNvPr>
@@ -4729,7 +4729,7 @@
           <p:cNvPr id="71" name="">
             <a:extLst xmlns:a="http://schemas.openxmlformats.org/drawingml/2006/main">
               <a:ext uri="{FF2B5EF4-FFF2-40B4-BE49-F238E27FC236}">
-                <a16:creationId xmlns:a16="http://schemas.microsoft.com/office/drawing/2014/main" id="{B4E797A9-8C3F-41E4-98EC-277C91F5077C}"/>
+                <a16:creationId xmlns:a16="http://schemas.microsoft.com/office/drawing/2014/main" id="{B5ED48B6-C6D0-4C2F-844F-81F97ADC3161}"/>
               </a:ext>
             </a:extLst>
           </p:cNvPr>
@@ -4793,7 +4793,7 @@
           <p:cNvPr id="72" name="">
             <a:extLst xmlns:a="http://schemas.openxmlformats.org/drawingml/2006/main">
               <a:ext uri="{FF2B5EF4-FFF2-40B4-BE49-F238E27FC236}">
-                <a16:creationId xmlns:a16="http://schemas.microsoft.com/office/drawing/2014/main" id="{153E7558-383B-4C3F-B41E-10982AF2F4D8}"/>
+                <a16:creationId xmlns:a16="http://schemas.microsoft.com/office/drawing/2014/main" id="{E2848244-219F-4A12-97D4-5631CA26D3C6}"/>
               </a:ext>
             </a:extLst>
           </p:cNvPr>
@@ -4903,7 +4903,7 @@
           <p:cNvPr id="73" name="">
             <a:extLst xmlns:a="http://schemas.openxmlformats.org/drawingml/2006/main">
               <a:ext uri="{FF2B5EF4-FFF2-40B4-BE49-F238E27FC236}">
-                <a16:creationId xmlns:a16="http://schemas.microsoft.com/office/drawing/2014/main" id="{6D030E9A-C3D2-4AAF-AC37-750BDA00FD48}"/>
+                <a16:creationId xmlns:a16="http://schemas.microsoft.com/office/drawing/2014/main" id="{25865D53-F5F8-4501-B305-6B860464CE57}"/>
               </a:ext>
             </a:extLst>
           </p:cNvPr>
@@ -4965,7 +4965,7 @@
     </p:spTree>
     <p:extLst>
       <p:ext uri="{BB962C8B-B14F-4D97-AF65-F5344CB8AC3E}">
-        <p14:creationId xmlns:p14="http://schemas.microsoft.com/office/powerpoint/2010/main" val="1786935905"/>
+        <p14:creationId xmlns:p14="http://schemas.microsoft.com/office/powerpoint/2010/main" val="2088195089"/>
       </p:ext>
     </p:extLst>
   </p:cSld>
